--- a/LTP + Lesson slides/1.3_文化入侵故宫星巴克_3 hrs.pptx
+++ b/LTP + Lesson slides/1.3_文化入侵故宫星巴克_3 hrs.pptx
@@ -3768,7 +3768,7 @@
           </a:prstGeom>
           <a:extLst>
             <a:ext uri="{C572A759-6A51-4108-AA02-DFA0A04FC94B}">
-              <ma14:wrappingTextBoxFlag xmlns="" xmlns:ma14="http://schemas.microsoft.com/office/mac/drawingml/2011/main" val="0"/>
+              <ma14:wrappingTextBoxFlag xmlns:ma14="http://schemas.microsoft.com/office/mac/drawingml/2011/main" xmlns="" val="0"/>
             </a:ext>
           </a:extLst>
         </p:spPr>
@@ -3846,7 +3846,7 @@
           </a:prstGeom>
           <a:extLst>
             <a:ext uri="{C572A759-6A51-4108-AA02-DFA0A04FC94B}">
-              <ma14:wrappingTextBoxFlag xmlns="" xmlns:ma14="http://schemas.microsoft.com/office/mac/drawingml/2011/main" val="0"/>
+              <ma14:wrappingTextBoxFlag xmlns:ma14="http://schemas.microsoft.com/office/mac/drawingml/2011/main" xmlns="" val="0"/>
             </a:ext>
           </a:extLst>
         </p:spPr>
@@ -4805,7 +4805,7 @@
           </a:prstGeom>
           <a:extLst>
             <a:ext uri="{C572A759-6A51-4108-AA02-DFA0A04FC94B}">
-              <ma14:wrappingTextBoxFlag xmlns="" xmlns:ma14="http://schemas.microsoft.com/office/mac/drawingml/2011/main" val="0"/>
+              <ma14:wrappingTextBoxFlag xmlns:ma14="http://schemas.microsoft.com/office/mac/drawingml/2011/main" xmlns="" val="0"/>
             </a:ext>
           </a:extLst>
         </p:spPr>
@@ -5759,7 +5759,7 @@
           </a:prstGeom>
           <a:extLst>
             <a:ext uri="{C572A759-6A51-4108-AA02-DFA0A04FC94B}">
-              <ma14:wrappingTextBoxFlag xmlns="" xmlns:ma14="http://schemas.microsoft.com/office/mac/drawingml/2011/main" val="0"/>
+              <ma14:wrappingTextBoxFlag xmlns:ma14="http://schemas.microsoft.com/office/mac/drawingml/2011/main" xmlns="" val="0"/>
             </a:ext>
           </a:extLst>
         </p:spPr>
@@ -7149,7 +7149,7 @@
           </a:prstGeom>
           <a:extLst>
             <a:ext uri="{C572A759-6A51-4108-AA02-DFA0A04FC94B}">
-              <ma14:wrappingTextBoxFlag xmlns="" xmlns:ma14="http://schemas.microsoft.com/office/mac/drawingml/2011/main" val="0"/>
+              <ma14:wrappingTextBoxFlag xmlns:ma14="http://schemas.microsoft.com/office/mac/drawingml/2011/main" xmlns="" val="0"/>
             </a:ext>
           </a:extLst>
         </p:spPr>
@@ -7788,7 +7788,7 @@
           </a:prstGeom>
           <a:extLst>
             <a:ext uri="{C572A759-6A51-4108-AA02-DFA0A04FC94B}">
-              <ma14:wrappingTextBoxFlag xmlns="" xmlns:ma14="http://schemas.microsoft.com/office/mac/drawingml/2011/main" val="0"/>
+              <ma14:wrappingTextBoxFlag xmlns:ma14="http://schemas.microsoft.com/office/mac/drawingml/2011/main" xmlns="" val="0"/>
             </a:ext>
           </a:extLst>
         </p:spPr>
@@ -8311,7 +8311,7 @@
           </a:prstGeom>
           <a:extLst>
             <a:ext uri="{C572A759-6A51-4108-AA02-DFA0A04FC94B}">
-              <ma14:wrappingTextBoxFlag xmlns="" xmlns:ma14="http://schemas.microsoft.com/office/mac/drawingml/2011/main" val="0"/>
+              <ma14:wrappingTextBoxFlag xmlns:ma14="http://schemas.microsoft.com/office/mac/drawingml/2011/main" xmlns="" val="0"/>
             </a:ext>
           </a:extLst>
         </p:spPr>
@@ -9022,7 +9022,7 @@
           </a:prstGeom>
           <a:extLst>
             <a:ext uri="{C572A759-6A51-4108-AA02-DFA0A04FC94B}">
-              <ma14:wrappingTextBoxFlag xmlns="" xmlns:ma14="http://schemas.microsoft.com/office/mac/drawingml/2011/main" val="0"/>
+              <ma14:wrappingTextBoxFlag xmlns:ma14="http://schemas.microsoft.com/office/mac/drawingml/2011/main" xmlns="" val="0"/>
             </a:ext>
           </a:extLst>
         </p:spPr>
@@ -9801,7 +9801,7 @@
           </a:prstGeom>
           <a:extLst>
             <a:ext uri="{C572A759-6A51-4108-AA02-DFA0A04FC94B}">
-              <ma14:wrappingTextBoxFlag xmlns="" xmlns:ma14="http://schemas.microsoft.com/office/mac/drawingml/2011/main" val="0"/>
+              <ma14:wrappingTextBoxFlag xmlns:ma14="http://schemas.microsoft.com/office/mac/drawingml/2011/main" xmlns="" val="0"/>
             </a:ext>
           </a:extLst>
         </p:spPr>
@@ -11083,7 +11083,7 @@
           </a:prstGeom>
           <a:extLst>
             <a:ext uri="{C572A759-6A51-4108-AA02-DFA0A04FC94B}">
-              <ma14:wrappingTextBoxFlag xmlns="" xmlns:ma14="http://schemas.microsoft.com/office/mac/drawingml/2011/main" val="0"/>
+              <ma14:wrappingTextBoxFlag xmlns:ma14="http://schemas.microsoft.com/office/mac/drawingml/2011/main" xmlns="" val="0"/>
             </a:ext>
           </a:extLst>
         </p:spPr>
@@ -11980,7 +11980,7 @@
           </a:prstGeom>
           <a:extLst>
             <a:ext uri="{C572A759-6A51-4108-AA02-DFA0A04FC94B}">
-              <ma14:wrappingTextBoxFlag xmlns="" xmlns:ma14="http://schemas.microsoft.com/office/mac/drawingml/2011/main" val="0"/>
+              <ma14:wrappingTextBoxFlag xmlns:ma14="http://schemas.microsoft.com/office/mac/drawingml/2011/main" xmlns="" val="0"/>
             </a:ext>
           </a:extLst>
         </p:spPr>
@@ -13088,7 +13088,7 @@
           </a:prstGeom>
           <a:extLst>
             <a:ext uri="{C572A759-6A51-4108-AA02-DFA0A04FC94B}">
-              <ma14:wrappingTextBoxFlag xmlns="" xmlns:ma14="http://schemas.microsoft.com/office/mac/drawingml/2011/main" val="0"/>
+              <ma14:wrappingTextBoxFlag xmlns:ma14="http://schemas.microsoft.com/office/mac/drawingml/2011/main" xmlns="" val="0"/>
             </a:ext>
           </a:extLst>
         </p:spPr>
@@ -13705,7 +13705,7 @@
           </a:prstGeom>
           <a:extLst>
             <a:ext uri="{C572A759-6A51-4108-AA02-DFA0A04FC94B}">
-              <ma14:wrappingTextBoxFlag xmlns="" xmlns:ma14="http://schemas.microsoft.com/office/mac/drawingml/2011/main" val="0"/>
+              <ma14:wrappingTextBoxFlag xmlns:ma14="http://schemas.microsoft.com/office/mac/drawingml/2011/main" xmlns="" val="0"/>
             </a:ext>
           </a:extLst>
         </p:spPr>
@@ -14696,7 +14696,7 @@
           </a:prstGeom>
           <a:extLst>
             <a:ext uri="{C572A759-6A51-4108-AA02-DFA0A04FC94B}">
-              <ma14:wrappingTextBoxFlag xmlns="" xmlns:ma14="http://schemas.microsoft.com/office/mac/drawingml/2011/main" val="0"/>
+              <ma14:wrappingTextBoxFlag xmlns:ma14="http://schemas.microsoft.com/office/mac/drawingml/2011/main" xmlns="" val="0"/>
             </a:ext>
           </a:extLst>
         </p:spPr>
@@ -15550,7 +15550,7 @@
           </a:prstGeom>
           <a:extLst>
             <a:ext uri="{C572A759-6A51-4108-AA02-DFA0A04FC94B}">
-              <ma14:wrappingTextBoxFlag xmlns="" xmlns:ma14="http://schemas.microsoft.com/office/mac/drawingml/2011/main" val="0"/>
+              <ma14:wrappingTextBoxFlag xmlns:ma14="http://schemas.microsoft.com/office/mac/drawingml/2011/main" xmlns="" val="0"/>
             </a:ext>
           </a:extLst>
         </p:spPr>
@@ -16716,7 +16716,7 @@
           </a:prstGeom>
           <a:extLst>
             <a:ext uri="{C572A759-6A51-4108-AA02-DFA0A04FC94B}">
-              <ma14:wrappingTextBoxFlag xmlns="" xmlns:ma14="http://schemas.microsoft.com/office/mac/drawingml/2011/main" val="0"/>
+              <ma14:wrappingTextBoxFlag xmlns:ma14="http://schemas.microsoft.com/office/mac/drawingml/2011/main" xmlns="" val="0"/>
             </a:ext>
           </a:extLst>
         </p:spPr>
@@ -18067,7 +18067,7 @@
           </a:prstGeom>
           <a:extLst>
             <a:ext uri="{C572A759-6A51-4108-AA02-DFA0A04FC94B}">
-              <ma14:wrappingTextBoxFlag xmlns="" xmlns:ma14="http://schemas.microsoft.com/office/mac/drawingml/2011/main" val="0"/>
+              <ma14:wrappingTextBoxFlag xmlns:ma14="http://schemas.microsoft.com/office/mac/drawingml/2011/main" xmlns="" val="0"/>
             </a:ext>
           </a:extLst>
         </p:spPr>
@@ -18916,7 +18916,7 @@
           </a:prstGeom>
           <a:extLst>
             <a:ext uri="{C572A759-6A51-4108-AA02-DFA0A04FC94B}">
-              <ma14:wrappingTextBoxFlag xmlns="" xmlns:ma14="http://schemas.microsoft.com/office/mac/drawingml/2011/main" val="0"/>
+              <ma14:wrappingTextBoxFlag xmlns:ma14="http://schemas.microsoft.com/office/mac/drawingml/2011/main" xmlns="" val="0"/>
             </a:ext>
           </a:extLst>
         </p:spPr>
@@ -19483,7 +19483,7 @@
           </a:prstGeom>
           <a:extLst>
             <a:ext uri="{C572A759-6A51-4108-AA02-DFA0A04FC94B}">
-              <ma14:wrappingTextBoxFlag xmlns="" xmlns:ma14="http://schemas.microsoft.com/office/mac/drawingml/2011/main" val="0"/>
+              <ma14:wrappingTextBoxFlag xmlns:ma14="http://schemas.microsoft.com/office/mac/drawingml/2011/main" xmlns="" val="0"/>
             </a:ext>
           </a:extLst>
         </p:spPr>
@@ -20158,7 +20158,7 @@
           </a:prstGeom>
           <a:extLst>
             <a:ext uri="{C572A759-6A51-4108-AA02-DFA0A04FC94B}">
-              <ma14:wrappingTextBoxFlag xmlns="" xmlns:ma14="http://schemas.microsoft.com/office/mac/drawingml/2011/main" val="0"/>
+              <ma14:wrappingTextBoxFlag xmlns:ma14="http://schemas.microsoft.com/office/mac/drawingml/2011/main" xmlns="" val="0"/>
             </a:ext>
           </a:extLst>
         </p:spPr>
@@ -20937,7 +20937,7 @@
           </a:prstGeom>
           <a:extLst>
             <a:ext uri="{C572A759-6A51-4108-AA02-DFA0A04FC94B}">
-              <ma14:wrappingTextBoxFlag xmlns="" xmlns:ma14="http://schemas.microsoft.com/office/mac/drawingml/2011/main" val="0"/>
+              <ma14:wrappingTextBoxFlag xmlns:ma14="http://schemas.microsoft.com/office/mac/drawingml/2011/main" xmlns="" val="0"/>
             </a:ext>
           </a:extLst>
         </p:spPr>
@@ -21856,7 +21856,7 @@
           </a:prstGeom>
           <a:extLst>
             <a:ext uri="{C572A759-6A51-4108-AA02-DFA0A04FC94B}">
-              <ma14:wrappingTextBoxFlag xmlns="" xmlns:ma14="http://schemas.microsoft.com/office/mac/drawingml/2011/main" val="0"/>
+              <ma14:wrappingTextBoxFlag xmlns:ma14="http://schemas.microsoft.com/office/mac/drawingml/2011/main" xmlns="" val="0"/>
             </a:ext>
           </a:extLst>
         </p:spPr>
@@ -23337,7 +23337,7 @@
           </a:prstGeom>
           <a:extLst>
             <a:ext uri="{C572A759-6A51-4108-AA02-DFA0A04FC94B}">
-              <ma14:wrappingTextBoxFlag xmlns="" xmlns:ma14="http://schemas.microsoft.com/office/mac/drawingml/2011/main" val="0"/>
+              <ma14:wrappingTextBoxFlag xmlns:ma14="http://schemas.microsoft.com/office/mac/drawingml/2011/main" xmlns="" val="0"/>
             </a:ext>
           </a:extLst>
         </p:spPr>
@@ -24375,7 +24375,7 @@
           </a:prstGeom>
           <a:extLst>
             <a:ext uri="{C572A759-6A51-4108-AA02-DFA0A04FC94B}">
-              <ma14:wrappingTextBoxFlag xmlns="" xmlns:ma14="http://schemas.microsoft.com/office/mac/drawingml/2011/main" val="0"/>
+              <ma14:wrappingTextBoxFlag xmlns:ma14="http://schemas.microsoft.com/office/mac/drawingml/2011/main" xmlns="" val="0"/>
             </a:ext>
           </a:extLst>
         </p:spPr>
@@ -25011,7 +25011,7 @@
           </a:prstGeom>
           <a:extLst>
             <a:ext uri="{C572A759-6A51-4108-AA02-DFA0A04FC94B}">
-              <ma14:wrappingTextBoxFlag xmlns="" xmlns:ma14="http://schemas.microsoft.com/office/mac/drawingml/2011/main" val="0"/>
+              <ma14:wrappingTextBoxFlag xmlns:ma14="http://schemas.microsoft.com/office/mac/drawingml/2011/main" xmlns="" val="0"/>
             </a:ext>
           </a:extLst>
         </p:spPr>
@@ -26414,7 +26414,7 @@
           </a:prstGeom>
           <a:extLst>
             <a:ext uri="{C572A759-6A51-4108-AA02-DFA0A04FC94B}">
-              <ma14:wrappingTextBoxFlag xmlns="" xmlns:ma14="http://schemas.microsoft.com/office/mac/drawingml/2011/main" val="0"/>
+              <ma14:wrappingTextBoxFlag xmlns:ma14="http://schemas.microsoft.com/office/mac/drawingml/2011/main" xmlns="" val="0"/>
             </a:ext>
           </a:extLst>
         </p:spPr>
@@ -27670,7 +27670,7 @@
           </a:prstGeom>
           <a:extLst>
             <a:ext uri="{C572A759-6A51-4108-AA02-DFA0A04FC94B}">
-              <ma14:wrappingTextBoxFlag xmlns="" xmlns:ma14="http://schemas.microsoft.com/office/mac/drawingml/2011/main" val="0"/>
+              <ma14:wrappingTextBoxFlag xmlns:ma14="http://schemas.microsoft.com/office/mac/drawingml/2011/main" xmlns="" val="0"/>
             </a:ext>
           </a:extLst>
         </p:spPr>
@@ -28263,7 +28263,7 @@
           </a:prstGeom>
           <a:extLst>
             <a:ext uri="{C572A759-6A51-4108-AA02-DFA0A04FC94B}">
-              <ma14:wrappingTextBoxFlag xmlns="" xmlns:ma14="http://schemas.microsoft.com/office/mac/drawingml/2011/main" val="0"/>
+              <ma14:wrappingTextBoxFlag xmlns:ma14="http://schemas.microsoft.com/office/mac/drawingml/2011/main" xmlns="" val="0"/>
             </a:ext>
           </a:extLst>
         </p:spPr>
@@ -29195,7 +29195,7 @@
           </a:prstGeom>
           <a:extLst>
             <a:ext uri="{C572A759-6A51-4108-AA02-DFA0A04FC94B}">
-              <ma14:wrappingTextBoxFlag xmlns="" xmlns:ma14="http://schemas.microsoft.com/office/mac/drawingml/2011/main" val="0"/>
+              <ma14:wrappingTextBoxFlag xmlns:ma14="http://schemas.microsoft.com/office/mac/drawingml/2011/main" xmlns="" val="0"/>
             </a:ext>
           </a:extLst>
         </p:spPr>
@@ -29868,7 +29868,7 @@
           </a:prstGeom>
           <a:extLst>
             <a:ext uri="{C572A759-6A51-4108-AA02-DFA0A04FC94B}">
-              <ma14:wrappingTextBoxFlag xmlns="" xmlns:ma14="http://schemas.microsoft.com/office/mac/drawingml/2011/main" val="0"/>
+              <ma14:wrappingTextBoxFlag xmlns:ma14="http://schemas.microsoft.com/office/mac/drawingml/2011/main" xmlns="" val="0"/>
             </a:ext>
           </a:extLst>
         </p:spPr>
@@ -30688,7 +30688,7 @@
           </a:prstGeom>
           <a:extLst>
             <a:ext uri="{C572A759-6A51-4108-AA02-DFA0A04FC94B}">
-              <ma14:wrappingTextBoxFlag xmlns="" xmlns:ma14="http://schemas.microsoft.com/office/mac/drawingml/2011/main" val="0"/>
+              <ma14:wrappingTextBoxFlag xmlns:ma14="http://schemas.microsoft.com/office/mac/drawingml/2011/main" xmlns="" val="0"/>
             </a:ext>
           </a:extLst>
         </p:spPr>
@@ -31412,7 +31412,7 @@
           </a:prstGeom>
           <a:extLst>
             <a:ext uri="{C572A759-6A51-4108-AA02-DFA0A04FC94B}">
-              <ma14:wrappingTextBoxFlag xmlns="" xmlns:ma14="http://schemas.microsoft.com/office/mac/drawingml/2011/main" val="0"/>
+              <ma14:wrappingTextBoxFlag xmlns:ma14="http://schemas.microsoft.com/office/mac/drawingml/2011/main" xmlns="" val="0"/>
             </a:ext>
           </a:extLst>
         </p:spPr>
@@ -32101,7 +32101,7 @@
           </a:prstGeom>
           <a:extLst>
             <a:ext uri="{C572A759-6A51-4108-AA02-DFA0A04FC94B}">
-              <ma14:wrappingTextBoxFlag xmlns="" xmlns:ma14="http://schemas.microsoft.com/office/mac/drawingml/2011/main" val="0"/>
+              <ma14:wrappingTextBoxFlag xmlns:ma14="http://schemas.microsoft.com/office/mac/drawingml/2011/main" xmlns="" val="0"/>
             </a:ext>
           </a:extLst>
         </p:spPr>
@@ -33222,7 +33222,7 @@
           </a:prstGeom>
           <a:extLst>
             <a:ext uri="{C572A759-6A51-4108-AA02-DFA0A04FC94B}">
-              <ma14:wrappingTextBoxFlag xmlns="" xmlns:ma14="http://schemas.microsoft.com/office/mac/drawingml/2011/main" val="0"/>
+              <ma14:wrappingTextBoxFlag xmlns:ma14="http://schemas.microsoft.com/office/mac/drawingml/2011/main" xmlns="" val="0"/>
             </a:ext>
           </a:extLst>
         </p:spPr>
@@ -34712,7 +34712,7 @@
           </a:prstGeom>
           <a:extLst>
             <a:ext uri="{C572A759-6A51-4108-AA02-DFA0A04FC94B}">
-              <ma14:wrappingTextBoxFlag xmlns="" xmlns:ma14="http://schemas.microsoft.com/office/mac/drawingml/2011/main" val="0"/>
+              <ma14:wrappingTextBoxFlag xmlns:ma14="http://schemas.microsoft.com/office/mac/drawingml/2011/main" xmlns="" val="0"/>
             </a:ext>
           </a:extLst>
         </p:spPr>
@@ -35559,7 +35559,7 @@
           </a:prstGeom>
           <a:extLst>
             <a:ext uri="{C572A759-6A51-4108-AA02-DFA0A04FC94B}">
-              <ma14:wrappingTextBoxFlag xmlns="" xmlns:ma14="http://schemas.microsoft.com/office/mac/drawingml/2011/main" val="0"/>
+              <ma14:wrappingTextBoxFlag xmlns:ma14="http://schemas.microsoft.com/office/mac/drawingml/2011/main" xmlns="" val="0"/>
             </a:ext>
           </a:extLst>
         </p:spPr>
@@ -35836,8 +35836,8 @@
         </p:nvSpPr>
         <p:spPr>
           <a:xfrm>
-            <a:off x="777240" y="2148840"/>
-            <a:ext cx="6858000" cy="502920"/>
+            <a:off x="777240" y="2276856"/>
+            <a:ext cx="9057424" cy="502920"/>
           </a:xfrm>
           <a:prstGeom prst="rect">
             <a:avLst/>
@@ -36638,7 +36638,7 @@
           </a:prstGeom>
           <a:extLst>
             <a:ext uri="{C572A759-6A51-4108-AA02-DFA0A04FC94B}">
-              <ma14:wrappingTextBoxFlag xmlns="" xmlns:ma14="http://schemas.microsoft.com/office/mac/drawingml/2011/main" val="0"/>
+              <ma14:wrappingTextBoxFlag xmlns:ma14="http://schemas.microsoft.com/office/mac/drawingml/2011/main" xmlns="" val="0"/>
             </a:ext>
           </a:extLst>
         </p:spPr>
@@ -37634,7 +37634,7 @@
           </a:prstGeom>
           <a:extLst>
             <a:ext uri="{C572A759-6A51-4108-AA02-DFA0A04FC94B}">
-              <ma14:wrappingTextBoxFlag xmlns="" xmlns:ma14="http://schemas.microsoft.com/office/mac/drawingml/2011/main" val="0"/>
+              <ma14:wrappingTextBoxFlag xmlns:ma14="http://schemas.microsoft.com/office/mac/drawingml/2011/main" xmlns="" val="0"/>
             </a:ext>
           </a:extLst>
         </p:spPr>
@@ -38587,7 +38587,7 @@
           </a:prstGeom>
           <a:extLst>
             <a:ext uri="{C572A759-6A51-4108-AA02-DFA0A04FC94B}">
-              <ma14:wrappingTextBoxFlag xmlns="" xmlns:ma14="http://schemas.microsoft.com/office/mac/drawingml/2011/main" val="0"/>
+              <ma14:wrappingTextBoxFlag xmlns:ma14="http://schemas.microsoft.com/office/mac/drawingml/2011/main" xmlns="" val="0"/>
             </a:ext>
           </a:extLst>
         </p:spPr>
@@ -39521,7 +39521,7 @@
           </a:prstGeom>
           <a:extLst>
             <a:ext uri="{C572A759-6A51-4108-AA02-DFA0A04FC94B}">
-              <ma14:wrappingTextBoxFlag xmlns="" xmlns:ma14="http://schemas.microsoft.com/office/mac/drawingml/2011/main" val="0"/>
+              <ma14:wrappingTextBoxFlag xmlns:ma14="http://schemas.microsoft.com/office/mac/drawingml/2011/main" xmlns="" val="0"/>
             </a:ext>
           </a:extLst>
         </p:spPr>
@@ -40034,7 +40034,7 @@
           </a:prstGeom>
           <a:extLst>
             <a:ext uri="{C572A759-6A51-4108-AA02-DFA0A04FC94B}">
-              <ma14:wrappingTextBoxFlag xmlns="" xmlns:ma14="http://schemas.microsoft.com/office/mac/drawingml/2011/main" val="0"/>
+              <ma14:wrappingTextBoxFlag xmlns:ma14="http://schemas.microsoft.com/office/mac/drawingml/2011/main" xmlns="" val="0"/>
             </a:ext>
           </a:extLst>
         </p:spPr>
